--- a/slide/one_slide.pptx
+++ b/slide/one_slide.pptx
@@ -3210,7 +3210,7 @@
                 </a:solidFill>
                 <a:latin typeface="Calibri"/>
               </a:rPr>
-              <a:t>Prompt changes now ship on evidence, not judgement</a:t>
+              <a:t>Slow &amp; Steady: prompt changes ship on evidence, not judgement</a:t>
             </a:r>
           </a:p>
         </p:txBody>

--- a/slide/one_slide.pptx
+++ b/slide/one_slide.pptx
@@ -3210,7 +3210,7 @@
                 </a:solidFill>
                 <a:latin typeface="Calibri"/>
               </a:rPr>
-              <a:t>Slow &amp; Steady: prompt changes ship on evidence, not judgement</a:t>
+              <a:t>Vani Lab: prompt changes ship on evidence, not judgement</a:t>
             </a:r>
           </a:p>
         </p:txBody>
